--- a/w9/c9/Mobile-and-Embedded-Lecture9.pptx
+++ b/w9/c9/Mobile-and-Embedded-Lecture9.pptx
@@ -1523,8 +1523,8 @@
         </p:nvSpPr>
         <p:spPr>
           <a:xfrm>
-            <a:off x="1143225" y="685800"/>
-            <a:ext cx="4572225" cy="3429000"/>
+            <a:off x="381000" y="685800"/>
+            <a:ext cx="6096000" cy="3429000"/>
           </a:xfrm>
           <a:custGeom>
             <a:avLst/>
@@ -1627,8 +1627,8 @@
         </p:nvSpPr>
         <p:spPr>
           <a:xfrm>
-            <a:off x="1143225" y="685800"/>
-            <a:ext cx="4572225" cy="3429000"/>
+            <a:off x="381000" y="685800"/>
+            <a:ext cx="6096000" cy="3429000"/>
           </a:xfrm>
           <a:custGeom>
             <a:avLst/>
@@ -16834,137 +16834,6 @@
           <a:chExt cx="0" cy="0"/>
         </a:xfrm>
       </p:grpSpPr>
-      <p:pic>
-        <p:nvPicPr>
-          <p:cNvPr id="137" name="Google Shape;137;p17" descr="image.png"/>
-          <p:cNvPicPr preferRelativeResize="0"/>
-          <p:nvPr/>
-        </p:nvPicPr>
-        <p:blipFill rotWithShape="1">
-          <a:blip r:embed="rId3">
-            <a:alphaModFix/>
-          </a:blip>
-          <a:srcRect/>
-          <a:stretch/>
-        </p:blipFill>
-        <p:spPr>
-          <a:xfrm>
-            <a:off x="0" y="0"/>
-            <a:ext cx="12192000" cy="6858000"/>
-          </a:xfrm>
-          <a:prstGeom prst="rect">
-            <a:avLst/>
-          </a:prstGeom>
-          <a:noFill/>
-          <a:ln>
-            <a:noFill/>
-          </a:ln>
-        </p:spPr>
-      </p:pic>
-      <p:pic>
-        <p:nvPicPr>
-          <p:cNvPr id="138" name="Google Shape;138;p17" descr="image.png"/>
-          <p:cNvPicPr preferRelativeResize="0"/>
-          <p:nvPr/>
-        </p:nvPicPr>
-        <p:blipFill rotWithShape="1">
-          <a:blip r:embed="rId4">
-            <a:alphaModFix/>
-          </a:blip>
-          <a:srcRect/>
-          <a:stretch/>
-        </p:blipFill>
-        <p:spPr>
-          <a:xfrm>
-            <a:off x="6334125" y="1943100"/>
-            <a:ext cx="5286375" cy="3810000"/>
-          </a:xfrm>
-          <a:prstGeom prst="rect">
-            <a:avLst/>
-          </a:prstGeom>
-          <a:noFill/>
-          <a:ln>
-            <a:noFill/>
-          </a:ln>
-        </p:spPr>
-      </p:pic>
-      <p:pic>
-        <p:nvPicPr>
-          <p:cNvPr id="139" name="Google Shape;139;p17" descr="image.png"/>
-          <p:cNvPicPr preferRelativeResize="0"/>
-          <p:nvPr/>
-        </p:nvPicPr>
-        <p:blipFill rotWithShape="1">
-          <a:blip r:embed="rId5">
-            <a:alphaModFix/>
-          </a:blip>
-          <a:srcRect/>
-          <a:stretch/>
-        </p:blipFill>
-        <p:spPr>
-          <a:xfrm>
-            <a:off x="6343650" y="1952625"/>
-            <a:ext cx="5267325" cy="3790950"/>
-          </a:xfrm>
-          <a:prstGeom prst="rect">
-            <a:avLst/>
-          </a:prstGeom>
-          <a:noFill/>
-          <a:ln>
-            <a:noFill/>
-          </a:ln>
-        </p:spPr>
-      </p:pic>
-      <p:sp>
-        <p:nvSpPr>
-          <p:cNvPr id="140" name="Google Shape;140;p17"/>
-          <p:cNvSpPr txBox="1"/>
-          <p:nvPr/>
-        </p:nvSpPr>
-        <p:spPr>
-          <a:xfrm>
-            <a:off x="695325" y="1943100"/>
-            <a:ext cx="114300" cy="304800"/>
-          </a:xfrm>
-          <a:prstGeom prst="rect">
-            <a:avLst/>
-          </a:prstGeom>
-          <a:noFill/>
-          <a:ln>
-            <a:noFill/>
-          </a:ln>
-        </p:spPr>
-        <p:txBody>
-          <a:bodyPr spcFirstLastPara="1" wrap="square" lIns="0" tIns="0" rIns="0" bIns="0" anchor="t" anchorCtr="0">
-            <a:spAutoFit/>
-          </a:bodyPr>
-          <a:lstStyle/>
-          <a:p>
-            <a:pPr marL="0" marR="0" lvl="0" indent="0" algn="l" rtl="0">
-              <a:spcBef>
-                <a:spcPts val="0"/>
-              </a:spcBef>
-              <a:spcAft>
-                <a:spcPts val="0"/>
-              </a:spcAft>
-              <a:buNone/>
-            </a:pPr>
-            <a:r>
-              <a:rPr lang="en-US" sz="1500" b="0" i="0" u="none" strike="noStrike" cap="none">
-                <a:solidFill>
-                  <a:srgbClr val="4A5568"/>
-                </a:solidFill>
-                <a:latin typeface="Lato"/>
-                <a:ea typeface="Lato"/>
-                <a:cs typeface="Lato"/>
-                <a:sym typeface="Lato"/>
-              </a:rPr>
-              <a:t>•</a:t>
-            </a:r>
-            <a:endParaRPr/>
-          </a:p>
-        </p:txBody>
-      </p:sp>
       <p:sp>
         <p:nvSpPr>
           <p:cNvPr id="141" name="Google Shape;141;p17"/>
@@ -16973,7 +16842,7 @@
         </p:nvSpPr>
         <p:spPr>
           <a:xfrm>
-            <a:off x="809625" y="1943100"/>
+            <a:off x="819150" y="1495425"/>
             <a:ext cx="5048250" cy="914400"/>
           </a:xfrm>
           <a:prstGeom prst="rect">
@@ -17003,7 +16872,7 @@
               <a:buNone/>
             </a:pPr>
             <a:r>
-              <a:rPr lang="en-US" sz="1500" b="1" i="0" u="none" strike="noStrike" cap="none">
+              <a:rPr lang="en-US" sz="1500" b="1" i="0" u="none" strike="noStrike" cap="none" dirty="0">
                 <a:solidFill>
                   <a:srgbClr val="4A5568"/>
                 </a:solidFill>
@@ -17015,7 +16884,7 @@
               <a:t>Community Maintained:</a:t>
             </a:r>
             <a:r>
-              <a:rPr lang="en-US" sz="1500" b="0" i="0" u="none" strike="noStrike" cap="none">
+              <a:rPr lang="en-US" sz="1500" b="0" i="0" u="none" strike="noStrike" cap="none" dirty="0">
                 <a:solidFill>
                   <a:srgbClr val="4A5568"/>
                 </a:solidFill>
@@ -17024,48 +16893,10 @@
                 <a:cs typeface="Lato"/>
                 <a:sym typeface="Lato"/>
               </a:rPr>
-              <a:t> The Flutter plugins (e.g., `google_mlkit_face_detection`) are high-quality, community-driven wrappers, not officially Google-sponsored.</a:t>
+              <a:t> The Flutter plugins (e.g., `</a:t>
             </a:r>
-            <a:endParaRPr/>
-          </a:p>
-        </p:txBody>
-      </p:sp>
-      <p:sp>
-        <p:nvSpPr>
-          <p:cNvPr id="142" name="Google Shape;142;p17"/>
-          <p:cNvSpPr txBox="1"/>
-          <p:nvPr/>
-        </p:nvSpPr>
-        <p:spPr>
-          <a:xfrm>
-            <a:off x="695325" y="3000375"/>
-            <a:ext cx="114300" cy="304800"/>
-          </a:xfrm>
-          <a:prstGeom prst="rect">
-            <a:avLst/>
-          </a:prstGeom>
-          <a:noFill/>
-          <a:ln>
-            <a:noFill/>
-          </a:ln>
-        </p:spPr>
-        <p:txBody>
-          <a:bodyPr spcFirstLastPara="1" wrap="square" lIns="0" tIns="0" rIns="0" bIns="0" anchor="t" anchorCtr="0">
-            <a:spAutoFit/>
-          </a:bodyPr>
-          <a:lstStyle/>
-          <a:p>
-            <a:pPr marL="0" marR="0" lvl="0" indent="0" algn="l" rtl="0">
-              <a:spcBef>
-                <a:spcPts val="0"/>
-              </a:spcBef>
-              <a:spcAft>
-                <a:spcPts val="0"/>
-              </a:spcAft>
-              <a:buNone/>
-            </a:pPr>
             <a:r>
-              <a:rPr lang="en-US" sz="1500" b="0" i="0" u="none" strike="noStrike" cap="none">
+              <a:rPr lang="en-US" sz="1500" b="0" i="0" u="none" strike="noStrike" cap="none" dirty="0" err="1">
                 <a:solidFill>
                   <a:srgbClr val="4A5568"/>
                 </a:solidFill>
@@ -17074,9 +16905,21 @@
                 <a:cs typeface="Lato"/>
                 <a:sym typeface="Lato"/>
               </a:rPr>
-              <a:t>•</a:t>
+              <a:t>google_mlkit_face_detection</a:t>
             </a:r>
-            <a:endParaRPr/>
+            <a:r>
+              <a:rPr lang="en-US" sz="1500" b="0" i="0" u="none" strike="noStrike" cap="none" dirty="0">
+                <a:solidFill>
+                  <a:srgbClr val="4A5568"/>
+                </a:solidFill>
+                <a:latin typeface="Lato"/>
+                <a:ea typeface="Lato"/>
+                <a:cs typeface="Lato"/>
+                <a:sym typeface="Lato"/>
+              </a:rPr>
+              <a:t>`) are high-quality, community-driven wrappers, not officially Google-sponsored.</a:t>
+            </a:r>
+            <a:endParaRPr dirty="0"/>
           </a:p>
         </p:txBody>
       </p:sp>
@@ -17118,7 +16961,7 @@
               <a:buNone/>
             </a:pPr>
             <a:r>
-              <a:rPr lang="en-US" sz="1500" b="1" i="0" u="none" strike="noStrike" cap="none">
+              <a:rPr lang="en-US" sz="1500" b="1" i="0" u="none" strike="noStrike" cap="none" dirty="0">
                 <a:solidFill>
                   <a:srgbClr val="4A5568"/>
                 </a:solidFill>
@@ -17130,7 +16973,7 @@
               <a:t>Platform Channels:</a:t>
             </a:r>
             <a:r>
-              <a:rPr lang="en-US" sz="1500" b="0" i="0" u="none" strike="noStrike" cap="none">
+              <a:rPr lang="en-US" sz="1500" b="0" i="0" u="none" strike="noStrike" cap="none" dirty="0">
                 <a:solidFill>
                   <a:srgbClr val="4A5568"/>
                 </a:solidFill>
@@ -17141,57 +16984,7 @@
               </a:rPr>
               <a:t> Plugins use Flutter's Platform Channel mechanism to call native Google ML Kit APIs on iOS and Android.</a:t>
             </a:r>
-            <a:endParaRPr/>
-          </a:p>
-        </p:txBody>
-      </p:sp>
-      <p:sp>
-        <p:nvSpPr>
-          <p:cNvPr id="144" name="Google Shape;144;p17"/>
-          <p:cNvSpPr txBox="1"/>
-          <p:nvPr/>
-        </p:nvSpPr>
-        <p:spPr>
-          <a:xfrm>
-            <a:off x="695325" y="4057650"/>
-            <a:ext cx="114300" cy="304800"/>
-          </a:xfrm>
-          <a:prstGeom prst="rect">
-            <a:avLst/>
-          </a:prstGeom>
-          <a:noFill/>
-          <a:ln>
-            <a:noFill/>
-          </a:ln>
-        </p:spPr>
-        <p:txBody>
-          <a:bodyPr spcFirstLastPara="1" wrap="square" lIns="0" tIns="0" rIns="0" bIns="0" anchor="t" anchorCtr="0">
-            <a:spAutoFit/>
-          </a:bodyPr>
-          <a:lstStyle/>
-          <a:p>
-            <a:pPr marL="0" marR="0" lvl="0" indent="0" algn="l" rtl="0">
-              <a:spcBef>
-                <a:spcPts val="0"/>
-              </a:spcBef>
-              <a:spcAft>
-                <a:spcPts val="0"/>
-              </a:spcAft>
-              <a:buNone/>
-            </a:pPr>
-            <a:r>
-              <a:rPr lang="en-US" sz="1500" b="0" i="0" u="none" strike="noStrike" cap="none">
-                <a:solidFill>
-                  <a:srgbClr val="4A5568"/>
-                </a:solidFill>
-                <a:latin typeface="Lato"/>
-                <a:ea typeface="Lato"/>
-                <a:cs typeface="Lato"/>
-                <a:sym typeface="Lato"/>
-              </a:rPr>
-              <a:t>•</a:t>
-            </a:r>
-            <a:endParaRPr/>
+            <a:endParaRPr dirty="0"/>
           </a:p>
         </p:txBody>
       </p:sp>
@@ -17233,7 +17026,7 @@
               <a:buNone/>
             </a:pPr>
             <a:r>
-              <a:rPr lang="en-US" sz="1500" b="1" i="0" u="none" strike="noStrike" cap="none">
+              <a:rPr lang="en-US" sz="1500" b="1" i="0" u="none" strike="noStrike" cap="none" dirty="0">
                 <a:solidFill>
                   <a:srgbClr val="4A5568"/>
                 </a:solidFill>
@@ -17245,7 +17038,7 @@
               <a:t>Mobile Only:</a:t>
             </a:r>
             <a:r>
-              <a:rPr lang="en-US" sz="1500" b="0" i="0" u="none" strike="noStrike" cap="none">
+              <a:rPr lang="en-US" sz="1500" b="0" i="0" u="none" strike="noStrike" cap="none" dirty="0">
                 <a:solidFill>
                   <a:srgbClr val="4A5568"/>
                 </a:solidFill>
@@ -17256,57 +17049,7 @@
               </a:rPr>
               <a:t> ML Kit is designed exclusively for mobile (iOS and Android). It does *not* support web.</a:t>
             </a:r>
-            <a:endParaRPr/>
-          </a:p>
-        </p:txBody>
-      </p:sp>
-      <p:sp>
-        <p:nvSpPr>
-          <p:cNvPr id="146" name="Google Shape;146;p17"/>
-          <p:cNvSpPr txBox="1"/>
-          <p:nvPr/>
-        </p:nvSpPr>
-        <p:spPr>
-          <a:xfrm>
-            <a:off x="695325" y="4810125"/>
-            <a:ext cx="114300" cy="304800"/>
-          </a:xfrm>
-          <a:prstGeom prst="rect">
-            <a:avLst/>
-          </a:prstGeom>
-          <a:noFill/>
-          <a:ln>
-            <a:noFill/>
-          </a:ln>
-        </p:spPr>
-        <p:txBody>
-          <a:bodyPr spcFirstLastPara="1" wrap="square" lIns="0" tIns="0" rIns="0" bIns="0" anchor="t" anchorCtr="0">
-            <a:spAutoFit/>
-          </a:bodyPr>
-          <a:lstStyle/>
-          <a:p>
-            <a:pPr marL="0" marR="0" lvl="0" indent="0" algn="l" rtl="0">
-              <a:spcBef>
-                <a:spcPts val="0"/>
-              </a:spcBef>
-              <a:spcAft>
-                <a:spcPts val="0"/>
-              </a:spcAft>
-              <a:buNone/>
-            </a:pPr>
-            <a:r>
-              <a:rPr lang="en-US" sz="1500" b="0" i="0" u="none" strike="noStrike" cap="none">
-                <a:solidFill>
-                  <a:srgbClr val="4A5568"/>
-                </a:solidFill>
-                <a:latin typeface="Lato"/>
-                <a:ea typeface="Lato"/>
-                <a:cs typeface="Lato"/>
-                <a:sym typeface="Lato"/>
-              </a:rPr>
-              <a:t>•</a:t>
-            </a:r>
-            <a:endParaRPr/>
+            <a:endParaRPr dirty="0"/>
           </a:p>
         </p:txBody>
       </p:sp>
@@ -17458,60 +17201,6 @@
           <a:chExt cx="0" cy="0"/>
         </a:xfrm>
       </p:grpSpPr>
-      <p:pic>
-        <p:nvPicPr>
-          <p:cNvPr id="153" name="Google Shape;153;p18" descr="image.png"/>
-          <p:cNvPicPr preferRelativeResize="0"/>
-          <p:nvPr/>
-        </p:nvPicPr>
-        <p:blipFill rotWithShape="1">
-          <a:blip r:embed="rId3">
-            <a:alphaModFix/>
-          </a:blip>
-          <a:srcRect/>
-          <a:stretch/>
-        </p:blipFill>
-        <p:spPr>
-          <a:xfrm>
-            <a:off x="0" y="0"/>
-            <a:ext cx="12192000" cy="6858000"/>
-          </a:xfrm>
-          <a:prstGeom prst="rect">
-            <a:avLst/>
-          </a:prstGeom>
-          <a:noFill/>
-          <a:ln>
-            <a:noFill/>
-          </a:ln>
-        </p:spPr>
-      </p:pic>
-      <p:pic>
-        <p:nvPicPr>
-          <p:cNvPr id="154" name="Google Shape;154;p18" descr="image.png"/>
-          <p:cNvPicPr preferRelativeResize="0"/>
-          <p:nvPr/>
-        </p:nvPicPr>
-        <p:blipFill rotWithShape="1">
-          <a:blip r:embed="rId4">
-            <a:alphaModFix/>
-          </a:blip>
-          <a:srcRect/>
-          <a:stretch/>
-        </p:blipFill>
-        <p:spPr>
-          <a:xfrm>
-            <a:off x="6334125" y="0"/>
-            <a:ext cx="5857875" cy="6858000"/>
-          </a:xfrm>
-          <a:prstGeom prst="rect">
-            <a:avLst/>
-          </a:prstGeom>
-          <a:noFill/>
-          <a:ln>
-            <a:noFill/>
-          </a:ln>
-        </p:spPr>
-      </p:pic>
       <p:sp>
         <p:nvSpPr>
           <p:cNvPr id="155" name="Google Shape;155;p18"/>
@@ -17703,7 +17392,7 @@
               <a:buNone/>
             </a:pPr>
             <a:r>
-              <a:rPr lang="en-US" sz="1500" b="0" i="0" u="none" strike="noStrike" cap="none">
+              <a:rPr lang="en-US" sz="1500" b="0" i="0" u="none" strike="noStrike" cap="none" dirty="0">
                 <a:solidFill>
                   <a:srgbClr val="4A5568"/>
                 </a:solidFill>
@@ -17714,7 +17403,7 @@
               </a:rPr>
               <a:t>This is exposed through new ML Kit GenAI APIs for tasks like summarization, proofreading, and rewriting.</a:t>
             </a:r>
-            <a:endParaRPr/>
+            <a:endParaRPr dirty="0"/>
           </a:p>
         </p:txBody>
       </p:sp>
